--- a/08-AI_CAMPUS-main/python-day2/Python_Day2.pptx
+++ b/08-AI_CAMPUS-main/python-day2/Python_Day2.pptx
@@ -3413,7 +3413,7 @@
                 <a:ea typeface="Malgun Gothic" pitchFamily="34" charset="-122"/>
                 <a:cs typeface="Malgun Gothic" pitchFamily="34" charset="-120"/>
               </a:rPr>
-              <a:t>강사: 박웅근 · 김정인</a:t>
+              <a:t>강사: 이몽룡 · 홍길동</a:t>
             </a:r>
             <a:endParaRPr lang="en-US" sz="1300" dirty="0"/>
           </a:p>
@@ -3854,7 +3854,7 @@
                 <a:latin typeface="Malgun Gothic" pitchFamily="34" charset="0"/>
                 <a:ea typeface="Malgun Gothic" pitchFamily="34" charset="-122"/>
                 <a:cs typeface="Malgun Gothic" pitchFamily="34" charset="-120"/>
-                <a:hlinkClick r:id="rId3" tooltip="https://imguru-mooc.github.io/AI_CAMPUS/python-day2/anim/index.html">
+                <a:hlinkClick r:id="rId3" tooltip="https://devops0906.github.io/AI_CAMPUS/python-day2/anim/index.html">
                   <a:extLst>
                     <a:ext uri="{A12FA001-AC4F-418D-AE19-62706E023703}">
                       <ahyp:hlinkClr xmlns:ahyp="http://schemas.microsoft.com/office/drawing/2018/hyperlinkcolor" val="tx"/>
@@ -6328,7 +6328,7 @@
                 <a:latin typeface="Malgun Gothic" pitchFamily="34" charset="0"/>
                 <a:ea typeface="Malgun Gothic" pitchFamily="34" charset="-122"/>
                 <a:cs typeface="Malgun Gothic" pitchFamily="34" charset="-120"/>
-                <a:hlinkClick r:id="rId3" tooltip="https://imguru-mooc.github.io/AI_CAMPUS/python-day1/anim/03_%EC%A0%9C%EC%96%B4%ED%9D%90%EB%A6%84_%EC%B6%94%EC%A0%81%EA%B8%B0.html">
+                <a:hlinkClick r:id="rId3" tooltip="https://devops0906.github.io/AI_CAMPUS/python-day1/anim/03_%EC%A0%9C%EC%96%B4%ED%9D%90%EB%A6%84_%EC%B6%94%EC%A0%81%EA%B8%B0.html">
                   <a:extLst>
                     <a:ext uri="{A12FA001-AC4F-418D-AE19-62706E023703}">
                       <ahyp:hlinkClr xmlns:ahyp="http://schemas.microsoft.com/office/drawing/2018/hyperlinkcolor" val="tx"/>
@@ -8802,7 +8802,7 @@
                 <a:latin typeface="Malgun Gothic" pitchFamily="34" charset="0"/>
                 <a:ea typeface="Malgun Gothic" pitchFamily="34" charset="-122"/>
                 <a:cs typeface="Malgun Gothic" pitchFamily="34" charset="-120"/>
-                <a:hlinkClick r:id="rId3" tooltip="https://imguru-mooc.github.io/AI_CAMPUS/python-day2/anim/D2-4_%EC%BB%B4%ED%94%84%EB%A6%AC%ED%97%A8%EC%85%98_%EB%B3%80%ED%99%98%EA%B8%B0.html">
+                <a:hlinkClick r:id="rId3" tooltip="https://devops0906.github.io/AI_CAMPUS/python-day2/anim/D2-4_%EC%BB%B4%ED%94%84%EB%A6%AC%ED%97%A8%EC%85%98_%EB%B3%80%ED%99%98%EA%B8%B0.html">
                   <a:extLst>
                     <a:ext uri="{A12FA001-AC4F-418D-AE19-62706E023703}">
                       <ahyp:hlinkClr xmlns:ahyp="http://schemas.microsoft.com/office/drawing/2018/hyperlinkcolor" val="tx"/>
@@ -11276,7 +11276,7 @@
                 <a:latin typeface="Malgun Gothic" pitchFamily="34" charset="0"/>
                 <a:ea typeface="Malgun Gothic" pitchFamily="34" charset="-122"/>
                 <a:cs typeface="Malgun Gothic" pitchFamily="34" charset="-120"/>
-                <a:hlinkClick r:id="rId3" tooltip="https://imguru-mooc.github.io/AI_CAMPUS/python-day2/anim/index.html">
+                <a:hlinkClick r:id="rId3" tooltip="https://devops0906.github.io/AI_CAMPUS/python-day2/anim/index.html">
                   <a:extLst>
                     <a:ext uri="{A12FA001-AC4F-418D-AE19-62706E023703}">
                       <ahyp:hlinkClr xmlns:ahyp="http://schemas.microsoft.com/office/drawing/2018/hyperlinkcolor" val="tx"/>
@@ -13750,7 +13750,7 @@
                 <a:latin typeface="Malgun Gothic" pitchFamily="34" charset="0"/>
                 <a:ea typeface="Malgun Gothic" pitchFamily="34" charset="-122"/>
                 <a:cs typeface="Malgun Gothic" pitchFamily="34" charset="-120"/>
-                <a:hlinkClick r:id="rId3" tooltip="https://imguru-mooc.github.io/AI_CAMPUS/python-day2/anim/index.html">
+                <a:hlinkClick r:id="rId3" tooltip="https://devops0906.github.io/AI_CAMPUS/python-day2/anim/index.html">
                   <a:extLst>
                     <a:ext uri="{A12FA001-AC4F-418D-AE19-62706E023703}">
                       <ahyp:hlinkClr xmlns:ahyp="http://schemas.microsoft.com/office/drawing/2018/hyperlinkcolor" val="tx"/>
@@ -24688,7 +24688,7 @@
       <p:sp>
         <p:nvSpPr>
           <p:cNvPr id="7" name="Text 4">
-            <a:hlinkClick r:id="rId3" tooltip="https://imguru-mooc.github.io/AI_CAMPUS/python-day2/anim/index.html"/>
+            <a:hlinkClick r:id="rId3" tooltip="https://devops0906.github.io/AI_CAMPUS/python-day2/anim/index.html"/>
           </p:cNvPr>
           <p:cNvSpPr txBox="1"/>
           <p:nvPr/>
@@ -24719,7 +24719,7 @@
                 <a:latin typeface="Courier New" pitchFamily="34" charset="0"/>
                 <a:ea typeface="Courier New" pitchFamily="34" charset="-122"/>
                 <a:cs typeface="Courier New" pitchFamily="34" charset="-120"/>
-                <a:hlinkClick r:id="rId3" tooltip="https://imguru-mooc.github.io/AI_CAMPUS/python-day2/anim/index.html">
+                <a:hlinkClick r:id="rId3" tooltip="https://devops0906.github.io/AI_CAMPUS/python-day2/anim/index.html">
                   <a:extLst>
                     <a:ext uri="{A12FA001-AC4F-418D-AE19-62706E023703}">
                       <ahyp:hlinkClr xmlns:ahyp="http://schemas.microsoft.com/office/drawing/2018/hyperlinkcolor" val="tx"/>
@@ -25133,7 +25133,7 @@
       <p:sp>
         <p:nvSpPr>
           <p:cNvPr id="15" name="Text 12">
-            <a:hlinkClick r:id="rId4" tooltip="https://imguru-mooc.github.io/AI_CAMPUS/python-day2/anim/worksheet.html"/>
+            <a:hlinkClick r:id="rId4" tooltip="https://devops0906.github.io/AI_CAMPUS/python-day2/anim/worksheet.html"/>
           </p:cNvPr>
           <p:cNvSpPr txBox="1"/>
           <p:nvPr/>
@@ -25164,7 +25164,7 @@
                 <a:latin typeface="Courier New" pitchFamily="34" charset="0"/>
                 <a:ea typeface="Courier New" pitchFamily="34" charset="-122"/>
                 <a:cs typeface="Courier New" pitchFamily="34" charset="-120"/>
-                <a:hlinkClick r:id="rId4" tooltip="https://imguru-mooc.github.io/AI_CAMPUS/python-day2/anim/worksheet.html">
+                <a:hlinkClick r:id="rId4" tooltip="https://devops0906.github.io/AI_CAMPUS/python-day2/anim/worksheet.html">
                   <a:extLst>
                     <a:ext uri="{A12FA001-AC4F-418D-AE19-62706E023703}">
                       <ahyp:hlinkClr xmlns:ahyp="http://schemas.microsoft.com/office/drawing/2018/hyperlinkcolor" val="tx"/>
@@ -25949,7 +25949,7 @@
       <p:sp>
         <p:nvSpPr>
           <p:cNvPr id="7" name="Text 4">
-            <a:hlinkClick r:id="rId3" tooltip="https://imguru-mooc.github.io/AI_CAMPUS/python-day2/anim/D2-3_%EB%A6%AC%EC%8A%A4%ED%8A%B8_%EB%A9%94%EC%84%9C%EB%93%9C_%EB%B9%84%EA%B5%90.html"/>
+            <a:hlinkClick r:id="rId3" tooltip="https://devops0906.github.io/AI_CAMPUS/python-day2/anim/D2-3_%EB%A6%AC%EC%8A%A4%ED%8A%B8_%EB%A9%94%EC%84%9C%EB%93%9C_%EB%B9%84%EA%B5%90.html"/>
           </p:cNvPr>
           <p:cNvSpPr txBox="1"/>
           <p:nvPr/>
@@ -25980,7 +25980,7 @@
                 <a:latin typeface="Malgun Gothic" pitchFamily="34" charset="0"/>
                 <a:ea typeface="Malgun Gothic" pitchFamily="34" charset="-122"/>
                 <a:cs typeface="Malgun Gothic" pitchFamily="34" charset="-120"/>
-                <a:hlinkClick r:id="rId3" tooltip="https://imguru-mooc.github.io/AI_CAMPUS/python-day2/anim/D2-3_%EB%A6%AC%EC%8A%A4%ED%8A%B8_%EB%A9%94%EC%84%9C%EB%93%9C_%EB%B9%84%EA%B5%90.html">
+                <a:hlinkClick r:id="rId3" tooltip="https://devops0906.github.io/AI_CAMPUS/python-day2/anim/D2-3_%EB%A6%AC%EC%8A%A4%ED%8A%B8_%EB%A9%94%EC%84%9C%EB%93%9C_%EB%B9%84%EA%B5%90.html">
                   <a:extLst>
                     <a:ext uri="{A12FA001-AC4F-418D-AE19-62706E023703}">
                       <ahyp:hlinkClr xmlns:ahyp="http://schemas.microsoft.com/office/drawing/2018/hyperlinkcolor" val="tx"/>
@@ -26148,7 +26148,7 @@
       <p:sp>
         <p:nvSpPr>
           <p:cNvPr id="12" name="Text 9">
-            <a:hlinkClick r:id="rId4" tooltip="https://imguru-mooc.github.io/AI_CAMPUS/python-day2/anim/D2-1_%EB%94%95%EC%85%94%EB%84%88%EB%A6%AC_%ED%95%B4%EC%8B%9C%EC%A1%B0%ED%9A%8C.html"/>
+            <a:hlinkClick r:id="rId4" tooltip="https://devops0906.github.io/AI_CAMPUS/python-day2/anim/D2-1_%EB%94%95%EC%85%94%EB%84%88%EB%A6%AC_%ED%95%B4%EC%8B%9C%EC%A1%B0%ED%9A%8C.html"/>
           </p:cNvPr>
           <p:cNvSpPr txBox="1"/>
           <p:nvPr/>
@@ -26179,7 +26179,7 @@
                 <a:latin typeface="Malgun Gothic" pitchFamily="34" charset="0"/>
                 <a:ea typeface="Malgun Gothic" pitchFamily="34" charset="-122"/>
                 <a:cs typeface="Malgun Gothic" pitchFamily="34" charset="-120"/>
-                <a:hlinkClick r:id="rId4" tooltip="https://imguru-mooc.github.io/AI_CAMPUS/python-day2/anim/D2-1_%EB%94%95%EC%85%94%EB%84%88%EB%A6%AC_%ED%95%B4%EC%8B%9C%EC%A1%B0%ED%9A%8C.html">
+                <a:hlinkClick r:id="rId4" tooltip="https://devops0906.github.io/AI_CAMPUS/python-day2/anim/D2-1_%EB%94%95%EC%85%94%EB%84%88%EB%A6%AC_%ED%95%B4%EC%8B%9C%EC%A1%B0%ED%9A%8C.html">
                   <a:extLst>
                     <a:ext uri="{A12FA001-AC4F-418D-AE19-62706E023703}">
                       <ahyp:hlinkClr xmlns:ahyp="http://schemas.microsoft.com/office/drawing/2018/hyperlinkcolor" val="tx"/>
@@ -26347,7 +26347,7 @@
       <p:sp>
         <p:nvSpPr>
           <p:cNvPr id="17" name="Text 14">
-            <a:hlinkClick r:id="rId5" tooltip="https://imguru-mooc.github.io/AI_CAMPUS/python-day2/anim/D2-2_%EC%A7%91%ED%95%A9_%EB%B2%A4%EB%8B%A4%EC%9D%B4%EC%96%B4%EA%B7%B8%EB%9E%A8.html"/>
+            <a:hlinkClick r:id="rId5" tooltip="https://devops0906.github.io/AI_CAMPUS/python-day2/anim/D2-2_%EC%A7%91%ED%95%A9_%EB%B2%A4%EB%8B%A4%EC%9D%B4%EC%96%B4%EA%B7%B8%EB%9E%A8.html"/>
           </p:cNvPr>
           <p:cNvSpPr txBox="1"/>
           <p:nvPr/>
@@ -26378,7 +26378,7 @@
                 <a:latin typeface="Malgun Gothic" pitchFamily="34" charset="0"/>
                 <a:ea typeface="Malgun Gothic" pitchFamily="34" charset="-122"/>
                 <a:cs typeface="Malgun Gothic" pitchFamily="34" charset="-120"/>
-                <a:hlinkClick r:id="rId5" tooltip="https://imguru-mooc.github.io/AI_CAMPUS/python-day2/anim/D2-2_%EC%A7%91%ED%95%A9_%EB%B2%A4%EB%8B%A4%EC%9D%B4%EC%96%B4%EA%B7%B8%EB%9E%A8.html">
+                <a:hlinkClick r:id="rId5" tooltip="https://devops0906.github.io/AI_CAMPUS/python-day2/anim/D2-2_%EC%A7%91%ED%95%A9_%EB%B2%A4%EB%8B%A4%EC%9D%B4%EC%96%B4%EA%B7%B8%EB%9E%A8.html">
                   <a:extLst>
                     <a:ext uri="{A12FA001-AC4F-418D-AE19-62706E023703}">
                       <ahyp:hlinkClr xmlns:ahyp="http://schemas.microsoft.com/office/drawing/2018/hyperlinkcolor" val="tx"/>
@@ -26546,7 +26546,7 @@
       <p:sp>
         <p:nvSpPr>
           <p:cNvPr id="22" name="Text 19">
-            <a:hlinkClick r:id="rId6" tooltip="https://imguru-mooc.github.io/AI_CAMPUS/python-day2/anim/D2-5_%EC%A4%91%EC%B2%A9%EC%9E%90%EB%A3%8C%EA%B5%AC%EC%A1%B0_%ED%8A%B8%EB%A6%AC%EB%B7%B0%EC%96%B4.html"/>
+            <a:hlinkClick r:id="rId6" tooltip="https://devops0906.github.io/AI_CAMPUS/python-day2/anim/D2-5_%EC%A4%91%EC%B2%A9%EC%9E%90%EB%A3%8C%EA%B5%AC%EC%A1%B0_%ED%8A%B8%EB%A6%AC%EB%B7%B0%EC%96%B4.html"/>
           </p:cNvPr>
           <p:cNvSpPr txBox="1"/>
           <p:nvPr/>
@@ -26577,7 +26577,7 @@
                 <a:latin typeface="Malgun Gothic" pitchFamily="34" charset="0"/>
                 <a:ea typeface="Malgun Gothic" pitchFamily="34" charset="-122"/>
                 <a:cs typeface="Malgun Gothic" pitchFamily="34" charset="-120"/>
-                <a:hlinkClick r:id="rId6" tooltip="https://imguru-mooc.github.io/AI_CAMPUS/python-day2/anim/D2-5_%EC%A4%91%EC%B2%A9%EC%9E%90%EB%A3%8C%EA%B5%AC%EC%A1%B0_%ED%8A%B8%EB%A6%AC%EB%B7%B0%EC%96%B4.html">
+                <a:hlinkClick r:id="rId6" tooltip="https://devops0906.github.io/AI_CAMPUS/python-day2/anim/D2-5_%EC%A4%91%EC%B2%A9%EC%9E%90%EB%A3%8C%EA%B5%AC%EC%A1%B0_%ED%8A%B8%EB%A6%AC%EB%B7%B0%EC%96%B4.html">
                   <a:extLst>
                     <a:ext uri="{A12FA001-AC4F-418D-AE19-62706E023703}">
                       <ahyp:hlinkClr xmlns:ahyp="http://schemas.microsoft.com/office/drawing/2018/hyperlinkcolor" val="tx"/>
@@ -26745,7 +26745,7 @@
       <p:sp>
         <p:nvSpPr>
           <p:cNvPr id="27" name="Text 24">
-            <a:hlinkClick r:id="rId7" tooltip="https://imguru-mooc.github.io/AI_CAMPUS/python-day2/anim/D2-4_%EC%BB%B4%ED%94%84%EB%A6%AC%ED%97%A8%EC%85%98_%EB%B3%80%ED%99%98%EA%B8%B0.html"/>
+            <a:hlinkClick r:id="rId7" tooltip="https://devops0906.github.io/AI_CAMPUS/python-day2/anim/D2-4_%EC%BB%B4%ED%94%84%EB%A6%AC%ED%97%A8%EC%85%98_%EB%B3%80%ED%99%98%EA%B8%B0.html"/>
           </p:cNvPr>
           <p:cNvSpPr txBox="1"/>
           <p:nvPr/>
@@ -26776,7 +26776,7 @@
                 <a:latin typeface="Malgun Gothic" pitchFamily="34" charset="0"/>
                 <a:ea typeface="Malgun Gothic" pitchFamily="34" charset="-122"/>
                 <a:cs typeface="Malgun Gothic" pitchFamily="34" charset="-120"/>
-                <a:hlinkClick r:id="rId7" tooltip="https://imguru-mooc.github.io/AI_CAMPUS/python-day2/anim/D2-4_%EC%BB%B4%ED%94%84%EB%A6%AC%ED%97%A8%EC%85%98_%EB%B3%80%ED%99%98%EA%B8%B0.html">
+                <a:hlinkClick r:id="rId7" tooltip="https://devops0906.github.io/AI_CAMPUS/python-day2/anim/D2-4_%EC%BB%B4%ED%94%84%EB%A6%AC%ED%97%A8%EC%85%98_%EB%B3%80%ED%99%98%EA%B8%B0.html">
                   <a:extLst>
                     <a:ext uri="{A12FA001-AC4F-418D-AE19-62706E023703}">
                       <ahyp:hlinkClr xmlns:ahyp="http://schemas.microsoft.com/office/drawing/2018/hyperlinkcolor" val="tx"/>
@@ -26944,7 +26944,7 @@
       <p:sp>
         <p:nvSpPr>
           <p:cNvPr id="32" name="Text 29">
-            <a:hlinkClick r:id="rId8" tooltip="https://imguru-mooc.github.io/AI_CAMPUS/python-day2/anim/D2-6_%EC%9E%90%EB%A3%8C%EA%B5%AC%EC%A1%B0_%EA%B2%B0%EC%A0%95%ED%8A%B8%EB%A6%AC.html"/>
+            <a:hlinkClick r:id="rId8" tooltip="https://devops0906.github.io/AI_CAMPUS/python-day2/anim/D2-6_%EC%9E%90%EB%A3%8C%EA%B5%AC%EC%A1%B0_%EA%B2%B0%EC%A0%95%ED%8A%B8%EB%A6%AC.html"/>
           </p:cNvPr>
           <p:cNvSpPr txBox="1"/>
           <p:nvPr/>
@@ -26975,7 +26975,7 @@
                 <a:latin typeface="Malgun Gothic" pitchFamily="34" charset="0"/>
                 <a:ea typeface="Malgun Gothic" pitchFamily="34" charset="-122"/>
                 <a:cs typeface="Malgun Gothic" pitchFamily="34" charset="-120"/>
-                <a:hlinkClick r:id="rId8" tooltip="https://imguru-mooc.github.io/AI_CAMPUS/python-day2/anim/D2-6_%EC%9E%90%EB%A3%8C%EA%B5%AC%EC%A1%B0_%EA%B2%B0%EC%A0%95%ED%8A%B8%EB%A6%AC.html">
+                <a:hlinkClick r:id="rId8" tooltip="https://devops0906.github.io/AI_CAMPUS/python-day2/anim/D2-6_%EC%9E%90%EB%A3%8C%EA%B5%AC%EC%A1%B0_%EA%B2%B0%EC%A0%95%ED%8A%B8%EB%A6%AC.html">
                   <a:extLst>
                     <a:ext uri="{A12FA001-AC4F-418D-AE19-62706E023703}">
                       <ahyp:hlinkClr xmlns:ahyp="http://schemas.microsoft.com/office/drawing/2018/hyperlinkcolor" val="tx"/>
@@ -27143,7 +27143,7 @@
       <p:sp>
         <p:nvSpPr>
           <p:cNvPr id="37" name="Text 34">
-            <a:hlinkClick r:id="rId9" tooltip="https://imguru-mooc.github.io/AI_CAMPUS/python-day1/anim/02_%EB%B3%80%EC%88%98_%EC%B0%B8%EC%A1%B0_%EB%AA%A8%EB%8D%B8.html"/>
+            <a:hlinkClick r:id="rId9" tooltip="https://devops0906.github.io/AI_CAMPUS/python-day1/anim/02_%EB%B3%80%EC%88%98_%EC%B0%B8%EC%A1%B0_%EB%AA%A8%EB%8D%B8.html"/>
           </p:cNvPr>
           <p:cNvSpPr txBox="1"/>
           <p:nvPr/>
@@ -27174,7 +27174,7 @@
                 <a:latin typeface="Malgun Gothic" pitchFamily="34" charset="0"/>
                 <a:ea typeface="Malgun Gothic" pitchFamily="34" charset="-122"/>
                 <a:cs typeface="Malgun Gothic" pitchFamily="34" charset="-120"/>
-                <a:hlinkClick r:id="rId9" tooltip="https://imguru-mooc.github.io/AI_CAMPUS/python-day1/anim/02_%EB%B3%80%EC%88%98_%EC%B0%B8%EC%A1%B0_%EB%AA%A8%EB%8D%B8.html">
+                <a:hlinkClick r:id="rId9" tooltip="https://devops0906.github.io/AI_CAMPUS/python-day1/anim/02_%EB%B3%80%EC%88%98_%EC%B0%B8%EC%A1%B0_%EB%AA%A8%EB%8D%B8.html">
                   <a:extLst>
                     <a:ext uri="{A12FA001-AC4F-418D-AE19-62706E023703}">
                       <ahyp:hlinkClr xmlns:ahyp="http://schemas.microsoft.com/office/drawing/2018/hyperlinkcolor" val="tx"/>
@@ -27342,7 +27342,7 @@
       <p:sp>
         <p:nvSpPr>
           <p:cNvPr id="42" name="Text 39">
-            <a:hlinkClick r:id="rId10" tooltip="https://imguru-mooc.github.io/AI_CAMPUS/python-day1/anim/03_%EC%A0%9C%EC%96%B4%ED%9D%90%EB%A6%84_%EC%B6%94%EC%A0%81%EA%B8%B0.html"/>
+            <a:hlinkClick r:id="rId10" tooltip="https://devops0906.github.io/AI_CAMPUS/python-day1/anim/03_%EC%A0%9C%EC%96%B4%ED%9D%90%EB%A6%84_%EC%B6%94%EC%A0%81%EA%B8%B0.html"/>
           </p:cNvPr>
           <p:cNvSpPr txBox="1"/>
           <p:nvPr/>
@@ -27373,7 +27373,7 @@
                 <a:latin typeface="Malgun Gothic" pitchFamily="34" charset="0"/>
                 <a:ea typeface="Malgun Gothic" pitchFamily="34" charset="-122"/>
                 <a:cs typeface="Malgun Gothic" pitchFamily="34" charset="-120"/>
-                <a:hlinkClick r:id="rId10" tooltip="https://imguru-mooc.github.io/AI_CAMPUS/python-day1/anim/03_%EC%A0%9C%EC%96%B4%ED%9D%90%EB%A6%84_%EC%B6%94%EC%A0%81%EA%B8%B0.html">
+                <a:hlinkClick r:id="rId10" tooltip="https://devops0906.github.io/AI_CAMPUS/python-day1/anim/03_%EC%A0%9C%EC%96%B4%ED%9D%90%EB%A6%84_%EC%B6%94%EC%A0%81%EA%B8%B0.html">
                   <a:extLst>
                     <a:ext uri="{A12FA001-AC4F-418D-AE19-62706E023703}">
                       <ahyp:hlinkClr xmlns:ahyp="http://schemas.microsoft.com/office/drawing/2018/hyperlinkcolor" val="tx"/>
@@ -27541,7 +27541,7 @@
       <p:sp>
         <p:nvSpPr>
           <p:cNvPr id="47" name="Text 44">
-            <a:hlinkClick r:id="rId11" tooltip="https://imguru-mooc.github.io/AI_CAMPUS/python-day1/anim/05_%EC%9D%B8%EB%8D%B1%EC%8B%B1_%EC%8A%AC%EB%9D%BC%EC%9D%B4%EC%8B%B1.html"/>
+            <a:hlinkClick r:id="rId11" tooltip="https://devops0906.github.io/AI_CAMPUS/python-day1/anim/05_%EC%9D%B8%EB%8D%B1%EC%8B%B1_%EC%8A%AC%EB%9D%BC%EC%9D%B4%EC%8B%B1.html"/>
           </p:cNvPr>
           <p:cNvSpPr txBox="1"/>
           <p:nvPr/>
@@ -27572,7 +27572,7 @@
                 <a:latin typeface="Malgun Gothic" pitchFamily="34" charset="0"/>
                 <a:ea typeface="Malgun Gothic" pitchFamily="34" charset="-122"/>
                 <a:cs typeface="Malgun Gothic" pitchFamily="34" charset="-120"/>
-                <a:hlinkClick r:id="rId11" tooltip="https://imguru-mooc.github.io/AI_CAMPUS/python-day1/anim/05_%EC%9D%B8%EB%8D%B1%EC%8B%B1_%EC%8A%AC%EB%9D%BC%EC%9D%B4%EC%8B%B1.html">
+                <a:hlinkClick r:id="rId11" tooltip="https://devops0906.github.io/AI_CAMPUS/python-day1/anim/05_%EC%9D%B8%EB%8D%B1%EC%8B%B1_%EC%8A%AC%EB%9D%BC%EC%9D%B4%EC%8B%B1.html">
                   <a:extLst>
                     <a:ext uri="{A12FA001-AC4F-418D-AE19-62706E023703}">
                       <ahyp:hlinkClr xmlns:ahyp="http://schemas.microsoft.com/office/drawing/2018/hyperlinkcolor" val="tx"/>
@@ -27740,7 +27740,7 @@
       <p:sp>
         <p:nvSpPr>
           <p:cNvPr id="52" name="Text 49">
-            <a:hlinkClick r:id="rId12" tooltip="https://imguru-mooc.github.io/AI_CAMPUS/python-day1/anim/04_%EB%AC%B8%EC%9E%90%EC%97%B4_%ED%8C%8C%EC%8B%B1_%ED%8C%8C%EC%9D%B4%ED%94%84%EB%9D%BC%EC%9D%B8.html"/>
+            <a:hlinkClick r:id="rId12" tooltip="https://devops0906.github.io/AI_CAMPUS/python-day1/anim/04_%EB%AC%B8%EC%9E%90%EC%97%B4_%ED%8C%8C%EC%8B%B1_%ED%8C%8C%EC%9D%B4%ED%94%84%EB%9D%BC%EC%9D%B8.html"/>
           </p:cNvPr>
           <p:cNvSpPr txBox="1"/>
           <p:nvPr/>
@@ -27771,7 +27771,7 @@
                 <a:latin typeface="Malgun Gothic" pitchFamily="34" charset="0"/>
                 <a:ea typeface="Malgun Gothic" pitchFamily="34" charset="-122"/>
                 <a:cs typeface="Malgun Gothic" pitchFamily="34" charset="-120"/>
-                <a:hlinkClick r:id="rId12" tooltip="https://imguru-mooc.github.io/AI_CAMPUS/python-day1/anim/04_%EB%AC%B8%EC%9E%90%EC%97%B4_%ED%8C%8C%EC%8B%B1_%ED%8C%8C%EC%9D%B4%ED%94%84%EB%9D%BC%EC%9D%B8.html">
+                <a:hlinkClick r:id="rId12" tooltip="https://devops0906.github.io/AI_CAMPUS/python-day1/anim/04_%EB%AC%B8%EC%9E%90%EC%97%B4_%ED%8C%8C%EC%8B%B1_%ED%8C%8C%EC%9D%B4%ED%94%84%EB%9D%BC%EC%9D%B8.html">
                   <a:extLst>
                     <a:ext uri="{A12FA001-AC4F-418D-AE19-62706E023703}">
                       <ahyp:hlinkClr xmlns:ahyp="http://schemas.microsoft.com/office/drawing/2018/hyperlinkcolor" val="tx"/>
@@ -27914,7 +27914,7 @@
                   </a:extLst>
                 </a:hlinkClick>
               </a:rPr>
-              <a:t>https://imguru-mooc.github.io/AI_CAMPUS/python-day2/anim/index.html</a:t>
+              <a:t>https://devops0906.github.io/AI_CAMPUS/python-day2/anim/index.html</a:t>
             </a:r>
             <a:r>
               <a:rPr lang="en-US" sz="1050" dirty="0">
@@ -29308,7 +29308,7 @@
                   </a:extLst>
                 </a:hlinkClick>
               </a:rPr>
-              <a:t>https://imguru-mooc.github.io/AI_CAMPUS/python-day2/anim/worksheet.html</a:t>
+              <a:t>https://devops0906.github.io/AI_CAMPUS/python-day2/anim/worksheet.html</a:t>
             </a:r>
             <a:endParaRPr lang="en-US" sz="900" dirty="0"/>
           </a:p>
@@ -29689,7 +29689,7 @@
                 <a:ea typeface="Malgun Gothic" pitchFamily="34" charset="-122"/>
                 <a:cs typeface="Malgun Gothic" pitchFamily="34" charset="-120"/>
               </a:rPr>
-              <a:t>온라인 자료 링크</a:t>
+              <a:t>레포 위치 링크</a:t>
             </a:r>
             <a:endParaRPr lang="en-US" sz="3000" dirty="0"/>
           </a:p>
@@ -29849,7 +29849,7 @@
                   </a:extLst>
                 </a:hlinkClick>
               </a:rPr>
-              <a:t>https://imguru-mooc.github.io/AI_CAMPUS/python-day2/anim/</a:t>
+              <a:t>https://devops0906.github.io/AI_CAMPUS/python-day2/anim/</a:t>
             </a:r>
             <a:endParaRPr lang="en-US" sz="2000" dirty="0"/>
           </a:p>
@@ -31126,7 +31126,7 @@
                 <a:latin typeface="Malgun Gothic" pitchFamily="34" charset="0"/>
                 <a:ea typeface="Malgun Gothic" pitchFamily="34" charset="-122"/>
                 <a:cs typeface="Malgun Gothic" pitchFamily="34" charset="-120"/>
-                <a:hlinkClick r:id="rId3" tooltip="https://imguru-mooc.github.io/AI_CAMPUS/python-day2/anim/index.html">
+                <a:hlinkClick r:id="rId3" tooltip="https://devops0906.github.io/AI_CAMPUS/python-day2/anim/index.html">
                   <a:extLst>
                     <a:ext uri="{A12FA001-AC4F-418D-AE19-62706E023703}">
                       <ahyp:hlinkClr xmlns:ahyp="http://schemas.microsoft.com/office/drawing/2018/hyperlinkcolor" val="tx"/>
